--- a/00Intro/slides/kubernetes-intro.pptx
+++ b/00Intro/slides/kubernetes-intro.pptx
@@ -10,15 +10,15 @@
   <p:sldIdLst>
     <p:sldId id="256" r:id="rId2"/>
     <p:sldId id="257" r:id="rId3"/>
-    <p:sldId id="258" r:id="rId4"/>
+    <p:sldId id="287" r:id="rId4"/>
     <p:sldId id="259" r:id="rId5"/>
-    <p:sldId id="260" r:id="rId6"/>
+    <p:sldId id="288" r:id="rId6"/>
     <p:sldId id="261" r:id="rId7"/>
     <p:sldId id="262" r:id="rId8"/>
     <p:sldId id="263" r:id="rId9"/>
     <p:sldId id="264" r:id="rId10"/>
     <p:sldId id="265" r:id="rId11"/>
-    <p:sldId id="284" r:id="rId12"/>
+    <p:sldId id="290" r:id="rId12"/>
     <p:sldId id="281" r:id="rId13"/>
     <p:sldId id="278" r:id="rId14"/>
     <p:sldId id="268" r:id="rId15"/>
@@ -4572,7 +4572,7 @@
         </p:nvSpPr>
         <p:spPr>
           <a:xfrm>
-            <a:off x="4851400" y="4089400"/>
+            <a:off x="4851400" y="4013200"/>
             <a:ext cx="6680200" cy="990600"/>
           </a:xfrm>
           <a:prstGeom prst="roundRect">
@@ -5635,7 +5635,7 @@
         </p:nvSpPr>
         <p:spPr>
           <a:xfrm>
-            <a:off x="4846320" y="5207000"/>
+            <a:off x="4846320" y="5029200"/>
             <a:ext cx="6675120" cy="1219200"/>
           </a:xfrm>
           <a:prstGeom prst="roundRect">
@@ -5669,7 +5669,7 @@
         </p:nvSpPr>
         <p:spPr>
           <a:xfrm>
-            <a:off x="5166360" y="5308600"/>
+            <a:off x="5166360" y="5130800"/>
             <a:ext cx="6126480" cy="304800"/>
           </a:xfrm>
           <a:prstGeom prst="rect">
@@ -5708,7 +5708,7 @@
         </p:nvSpPr>
         <p:spPr>
           <a:xfrm>
-            <a:off x="5166360" y="5638800"/>
+            <a:off x="5166360" y="5461000"/>
             <a:ext cx="6126480" cy="736600"/>
           </a:xfrm>
           <a:prstGeom prst="rect">
@@ -6189,7 +6189,7 @@
         </p:nvSpPr>
         <p:spPr>
           <a:xfrm>
-            <a:off x="5168900" y="4191000"/>
+            <a:off x="5168900" y="4114800"/>
             <a:ext cx="6121400" cy="304800"/>
           </a:xfrm>
           <a:prstGeom prst="rect">
@@ -6234,7 +6234,7 @@
         </p:nvSpPr>
         <p:spPr>
           <a:xfrm>
-            <a:off x="5168900" y="4521200"/>
+            <a:off x="5168900" y="4445000"/>
             <a:ext cx="6121400" cy="508000"/>
           </a:xfrm>
           <a:prstGeom prst="rect">
@@ -6312,10 +6312,182 @@
           </a:p>
         </p:txBody>
       </p:sp>
+      <p:sp>
+        <p:nvSpPr>
+          <p:cNvPr id="46" name="LayerNote">
+            <a:extLst>
+              <a:ext uri="{FF2B5EF4-FFF2-40B4-BE49-F238E27FC236}">
+                <a16:creationId xmlns:a16="http://schemas.microsoft.com/office/drawing/2014/main" id="{8A91C480-D54B-44A8-8806-535DA5587195}"/>
+              </a:ext>
+            </a:extLst>
+          </p:cNvPr>
+          <p:cNvSpPr txBox="1"/>
+          <p:nvPr/>
+        </p:nvSpPr>
+        <p:spPr>
+          <a:xfrm>
+            <a:off x="4851400" y="6375400"/>
+            <a:ext cx="6680200" cy="254000"/>
+          </a:xfrm>
+          <a:prstGeom prst="rect">
+            <a:avLst/>
+          </a:prstGeom>
+          <a:noFill/>
+        </p:spPr>
+        <p:txBody>
+          <a:bodyPr vertOverflow="overflow" vert="horz" wrap="none" rtlCol="0" anchor="t">
+            <a:noAutofit/>
+          </a:bodyPr>
+          <a:lstStyle/>
+          <a:p>
+            <a:pPr algn="l"/>
+            <a:r>
+              <a:rPr lang="en-US" altLang="ja-JP" sz="1100" dirty="0">
+                <a:solidFill>
+                  <a:srgbClr val="5D6B85"/>
+                </a:solidFill>
+                <a:latin typeface="Meiryo"/>
+                <a:ea typeface="Meiryo"/>
+              </a:rPr>
+              <a:t>※ L</a:t>
+            </a:r>
+            <a:r>
+              <a:rPr lang="ja-JP" altLang="en-US" sz="1100" dirty="0">
+                <a:solidFill>
+                  <a:srgbClr val="5D6B85"/>
+                </a:solidFill>
+                <a:latin typeface="Meiryo"/>
+                <a:ea typeface="Meiryo"/>
+              </a:rPr>
+              <a:t>＝</a:t>
+            </a:r>
+            <a:r>
+              <a:rPr lang="en-US" altLang="ja-JP" sz="1100" dirty="0">
+                <a:solidFill>
+                  <a:srgbClr val="5D6B85"/>
+                </a:solidFill>
+                <a:latin typeface="Meiryo"/>
+                <a:ea typeface="Meiryo"/>
+              </a:rPr>
+              <a:t>OSI</a:t>
+            </a:r>
+            <a:r>
+              <a:rPr lang="ja-JP" altLang="en-US" sz="1100" dirty="0">
+                <a:solidFill>
+                  <a:srgbClr val="5D6B85"/>
+                </a:solidFill>
+                <a:latin typeface="Meiryo"/>
+                <a:ea typeface="Meiryo"/>
+              </a:rPr>
+              <a:t>参照モデルの階層。</a:t>
+            </a:r>
+            <a:r>
+              <a:rPr lang="en-US" altLang="ja-JP" sz="1100" dirty="0">
+                <a:solidFill>
+                  <a:srgbClr val="5D6B85"/>
+                </a:solidFill>
+                <a:latin typeface="Meiryo"/>
+                <a:ea typeface="Meiryo"/>
+              </a:rPr>
+              <a:t>L4</a:t>
+            </a:r>
+            <a:r>
+              <a:rPr lang="ja-JP" altLang="en-US" sz="1100" dirty="0">
+                <a:solidFill>
+                  <a:srgbClr val="5D6B85"/>
+                </a:solidFill>
+                <a:latin typeface="Meiryo"/>
+                <a:ea typeface="Meiryo"/>
+              </a:rPr>
+              <a:t>＝トランスポート層</a:t>
+            </a:r>
+            <a:r>
+              <a:rPr lang="en-US" altLang="ja-JP" sz="1100" dirty="0">
+                <a:solidFill>
+                  <a:srgbClr val="5D6B85"/>
+                </a:solidFill>
+                <a:latin typeface="Meiryo"/>
+                <a:ea typeface="Meiryo"/>
+              </a:rPr>
+              <a:t>(TCP/UDP</a:t>
+            </a:r>
+            <a:r>
+              <a:rPr lang="ja-JP" altLang="en-US" sz="1100" dirty="0">
+                <a:solidFill>
+                  <a:srgbClr val="5D6B85"/>
+                </a:solidFill>
+                <a:latin typeface="Meiryo"/>
+                <a:ea typeface="Meiryo"/>
+              </a:rPr>
+              <a:t>ポート</a:t>
+            </a:r>
+            <a:r>
+              <a:rPr lang="en-US" altLang="ja-JP" sz="1100" dirty="0">
+                <a:solidFill>
+                  <a:srgbClr val="5D6B85"/>
+                </a:solidFill>
+                <a:latin typeface="Meiryo"/>
+                <a:ea typeface="Meiryo"/>
+              </a:rPr>
+              <a:t>)</a:t>
+            </a:r>
+            <a:r>
+              <a:rPr lang="ja-JP" altLang="en-US" sz="1100" dirty="0">
+                <a:solidFill>
+                  <a:srgbClr val="5D6B85"/>
+                </a:solidFill>
+                <a:latin typeface="Meiryo"/>
+                <a:ea typeface="Meiryo"/>
+              </a:rPr>
+              <a:t>、</a:t>
+            </a:r>
+            <a:r>
+              <a:rPr lang="en-US" altLang="ja-JP" sz="1100" dirty="0">
+                <a:solidFill>
+                  <a:srgbClr val="5D6B85"/>
+                </a:solidFill>
+                <a:latin typeface="Meiryo"/>
+                <a:ea typeface="Meiryo"/>
+              </a:rPr>
+              <a:t>L7</a:t>
+            </a:r>
+            <a:r>
+              <a:rPr lang="ja-JP" altLang="en-US" sz="1100" dirty="0">
+                <a:solidFill>
+                  <a:srgbClr val="5D6B85"/>
+                </a:solidFill>
+                <a:latin typeface="Meiryo"/>
+                <a:ea typeface="Meiryo"/>
+              </a:rPr>
+              <a:t>＝アプリケーション層</a:t>
+            </a:r>
+            <a:r>
+              <a:rPr lang="en-US" altLang="ja-JP" sz="1100" dirty="0">
+                <a:solidFill>
+                  <a:srgbClr val="5D6B85"/>
+                </a:solidFill>
+                <a:latin typeface="Meiryo"/>
+                <a:ea typeface="Meiryo"/>
+              </a:rPr>
+              <a:t>(HTTP)</a:t>
+            </a:r>
+            <a:r>
+              <a:rPr lang="ja-JP" altLang="en-US" sz="1100" dirty="0">
+                <a:solidFill>
+                  <a:srgbClr val="5D6B85"/>
+                </a:solidFill>
+                <a:latin typeface="Meiryo"/>
+                <a:ea typeface="Meiryo"/>
+              </a:rPr>
+              <a:t>。</a:t>
+            </a:r>
+          </a:p>
+        </p:txBody>
+      </p:sp>
     </p:spTree>
     <p:extLst>
       <p:ext uri="{BB962C8B-B14F-4D97-AF65-F5344CB8AC3E}">
-        <p14:creationId xmlns:p14="http://schemas.microsoft.com/office/powerpoint/2010/main" val="1961197396"/>
+        <p14:creationId xmlns:p14="http://schemas.microsoft.com/office/powerpoint/2010/main" val="880945135"/>
       </p:ext>
     </p:extLst>
   </p:cSld>
@@ -12423,7 +12595,7 @@
                 <a:ea typeface="Meiryo" pitchFamily="34" charset="-122"/>
                 <a:cs typeface="Meiryo" pitchFamily="34" charset="-120"/>
               </a:rPr>
-              <a:t>まず前提をそろえる：Dockerはどこまで面倒を見てくれるのか</a:t>
+              <a:t>前提：クライアントにWebサーバーを提供する。サービスとして止めずに動かし続けられるか</a:t>
             </a:r>
             <a:endParaRPr lang="en-US" sz="1350" dirty="0"/>
           </a:p>
@@ -12455,6 +12627,13 @@
             <a:prstDash val="solid"/>
           </a:ln>
         </p:spPr>
+        <p:txBody>
+          <a:bodyPr/>
+          <a:lstStyle/>
+          <a:p>
+            <a:endParaRPr lang="ja-JP" altLang="en-US"/>
+          </a:p>
+        </p:txBody>
       </p:sp>
       <p:sp>
         <p:nvSpPr>
@@ -12531,7 +12710,7 @@
                 <a:ea typeface="Meiryo" pitchFamily="34" charset="-122"/>
                 <a:cs typeface="Meiryo" pitchFamily="34" charset="-120"/>
               </a:rPr>
-              <a:t>1台のホストで、1つ（数個）のコンテナを</a:t>
+              <a:t>1台のホスト（host）の上で、Webサーバーの</a:t>
             </a:r>
             <a:endParaRPr lang="en-US" sz="1400" dirty="0"/>
           </a:p>
@@ -12551,7 +12730,7 @@
                 <a:ea typeface="Meiryo" pitchFamily="34" charset="-122"/>
                 <a:cs typeface="Meiryo" pitchFamily="34" charset="-120"/>
               </a:rPr>
-              <a:t>「どう動かすか」</a:t>
+              <a:t>コンテナ（container）を「どう動かすか」</a:t>
             </a:r>
             <a:endParaRPr lang="en-US" sz="1400" dirty="0"/>
           </a:p>
@@ -12583,6 +12762,13 @@
             <a:prstDash val="solid"/>
           </a:ln>
         </p:spPr>
+        <p:txBody>
+          <a:bodyPr/>
+          <a:lstStyle/>
+          <a:p>
+            <a:endParaRPr lang="ja-JP" altLang="en-US"/>
+          </a:p>
+        </p:txBody>
       </p:sp>
       <p:sp>
         <p:nvSpPr>
@@ -12592,7 +12778,7 @@
         </p:nvSpPr>
         <p:spPr>
           <a:xfrm>
-            <a:off x="2496312" y="3438144"/>
+            <a:off x="2496312" y="3708400"/>
             <a:ext cx="1545336" cy="274320"/>
           </a:xfrm>
           <a:prstGeom prst="roundRect">
@@ -12610,6 +12796,13 @@
             <a:prstDash val="solid"/>
           </a:ln>
         </p:spPr>
+        <p:txBody>
+          <a:bodyPr/>
+          <a:lstStyle/>
+          <a:p>
+            <a:endParaRPr lang="ja-JP" altLang="en-US"/>
+          </a:p>
+        </p:txBody>
       </p:sp>
       <p:sp>
         <p:nvSpPr>
@@ -12619,7 +12812,7 @@
         </p:nvSpPr>
         <p:spPr>
           <a:xfrm>
-            <a:off x="2496312" y="3438144"/>
+            <a:off x="2496312" y="3708400"/>
             <a:ext cx="1545336" cy="274320"/>
           </a:xfrm>
           <a:prstGeom prst="rect">
@@ -12644,7 +12837,7 @@
                 <a:ea typeface="Meiryo" pitchFamily="34" charset="-122"/>
                 <a:cs typeface="Meiryo" pitchFamily="34" charset="-120"/>
               </a:rPr>
-              <a:t>Pod</a:t>
+              <a:t>container</a:t>
             </a:r>
             <a:endParaRPr lang="en-US" sz="900" dirty="0"/>
           </a:p>
@@ -12652,14 +12845,345 @@
       </p:sp>
       <p:sp>
         <p:nvSpPr>
-          <p:cNvPr id="10" name="Shape 8"/>
-          <p:cNvSpPr/>
-          <p:nvPr/>
-        </p:nvSpPr>
-        <p:spPr>
-          <a:xfrm>
-            <a:off x="2496312" y="3822192"/>
-            <a:ext cx="1545336" cy="274320"/>
+          <p:cNvPr id="12" name="Text 10"/>
+          <p:cNvSpPr/>
+          <p:nvPr/>
+        </p:nvSpPr>
+        <p:spPr>
+          <a:xfrm>
+            <a:off x="2331720" y="4306824"/>
+            <a:ext cx="1874520" cy="256032"/>
+          </a:xfrm>
+          <a:prstGeom prst="rect">
+            <a:avLst/>
+          </a:prstGeom>
+          <a:noFill/>
+          <a:ln/>
+        </p:spPr>
+        <p:txBody>
+          <a:bodyPr wrap="square" lIns="0" tIns="0" rIns="0" bIns="0" rtlCol="0" anchor="ctr"/>
+          <a:lstStyle/>
+          <a:p>
+            <a:pPr marL="0" indent="0" algn="ctr">
+              <a:buNone/>
+            </a:pPr>
+            <a:r>
+              <a:rPr lang="en-US" sz="900" dirty="0">
+                <a:solidFill>
+                  <a:srgbClr val="5D6B85"/>
+                </a:solidFill>
+                <a:latin typeface="Meiryo" pitchFamily="34" charset="0"/>
+                <a:ea typeface="Meiryo" pitchFamily="34" charset="-122"/>
+                <a:cs typeface="Meiryo" pitchFamily="34" charset="-120"/>
+              </a:rPr>
+              <a:t>host（1台）</a:t>
+            </a:r>
+            <a:endParaRPr lang="en-US" sz="900" dirty="0"/>
+          </a:p>
+        </p:txBody>
+      </p:sp>
+      <p:sp>
+        <p:nvSpPr>
+          <p:cNvPr id="13" name="Text 11"/>
+          <p:cNvSpPr/>
+          <p:nvPr/>
+        </p:nvSpPr>
+        <p:spPr>
+          <a:xfrm>
+            <a:off x="960120" y="4800600"/>
+            <a:ext cx="4663440" cy="685800"/>
+          </a:xfrm>
+          <a:prstGeom prst="rect">
+            <a:avLst/>
+          </a:prstGeom>
+          <a:noFill/>
+          <a:ln/>
+        </p:spPr>
+        <p:txBody>
+          <a:bodyPr wrap="square" lIns="0" tIns="0" rIns="0" bIns="0" rtlCol="0" anchor="t"/>
+          <a:lstStyle/>
+          <a:p>
+            <a:pPr marL="0" indent="0">
+              <a:lnSpc>
+                <a:spcPts val="1900"/>
+              </a:lnSpc>
+              <a:buNone/>
+            </a:pPr>
+            <a:r>
+              <a:rPr lang="en-US" sz="1300" dirty="0">
+                <a:solidFill>
+                  <a:srgbClr val="5D6B85"/>
+                </a:solidFill>
+                <a:latin typeface="Meiryo" pitchFamily="34" charset="0"/>
+                <a:ea typeface="Meiryo" pitchFamily="34" charset="-122"/>
+                <a:cs typeface="Meiryo" pitchFamily="34" charset="-120"/>
+              </a:rPr>
+              <a:t>docker run した瞬間は動く。1台なので、</a:t>
+            </a:r>
+            <a:endParaRPr lang="en-US" sz="1300" dirty="0"/>
+          </a:p>
+          <a:p>
+            <a:pPr marL="0" indent="0">
+              <a:lnSpc>
+                <a:spcPts val="1900"/>
+              </a:lnSpc>
+              <a:buNone/>
+            </a:pPr>
+            <a:r>
+              <a:rPr lang="en-US" sz="1300" dirty="0">
+                <a:solidFill>
+                  <a:srgbClr val="5D6B85"/>
+                </a:solidFill>
+                <a:latin typeface="Meiryo" pitchFamily="34" charset="0"/>
+                <a:ea typeface="Meiryo" pitchFamily="34" charset="-122"/>
+                <a:cs typeface="Meiryo" pitchFamily="34" charset="-120"/>
+              </a:rPr>
+              <a:t>落ちればサービスはそのまま止まる。</a:t>
+            </a:r>
+            <a:endParaRPr lang="en-US" sz="1300" dirty="0"/>
+          </a:p>
+        </p:txBody>
+      </p:sp>
+      <p:sp>
+        <p:nvSpPr>
+          <p:cNvPr id="14" name="Text 12"/>
+          <p:cNvSpPr/>
+          <p:nvPr/>
+        </p:nvSpPr>
+        <p:spPr>
+          <a:xfrm>
+            <a:off x="5989320" y="3566160"/>
+            <a:ext cx="594360" cy="548640"/>
+          </a:xfrm>
+          <a:prstGeom prst="rect">
+            <a:avLst/>
+          </a:prstGeom>
+          <a:noFill/>
+          <a:ln/>
+        </p:spPr>
+        <p:txBody>
+          <a:bodyPr wrap="square" lIns="0" tIns="0" rIns="0" bIns="0" rtlCol="0" anchor="ctr"/>
+          <a:lstStyle/>
+          <a:p>
+            <a:pPr marL="0" indent="0" algn="ctr">
+              <a:buNone/>
+            </a:pPr>
+            <a:r>
+              <a:rPr lang="en-US" sz="3000" b="1" dirty="0">
+                <a:solidFill>
+                  <a:srgbClr val="326CE5"/>
+                </a:solidFill>
+                <a:latin typeface="Meiryo" pitchFamily="34" charset="0"/>
+                <a:ea typeface="Meiryo" pitchFamily="34" charset="-122"/>
+                <a:cs typeface="Meiryo" pitchFamily="34" charset="-120"/>
+              </a:rPr>
+              <a:t>→</a:t>
+            </a:r>
+            <a:endParaRPr lang="en-US" sz="3000" dirty="0"/>
+          </a:p>
+        </p:txBody>
+      </p:sp>
+      <p:sp>
+        <p:nvSpPr>
+          <p:cNvPr id="15" name="Shape 13"/>
+          <p:cNvSpPr/>
+          <p:nvPr/>
+        </p:nvSpPr>
+        <p:spPr>
+          <a:xfrm>
+            <a:off x="6629400" y="1783080"/>
+            <a:ext cx="4892040" cy="4023360"/>
+          </a:xfrm>
+          <a:prstGeom prst="roundRect">
+            <a:avLst>
+              <a:gd name="adj" fmla="val 1364"/>
+            </a:avLst>
+          </a:prstGeom>
+          <a:solidFill>
+            <a:srgbClr val="E8EEF9"/>
+          </a:solidFill>
+          <a:ln w="12700">
+            <a:solidFill>
+              <a:srgbClr val="E8EEF9"/>
+            </a:solidFill>
+            <a:prstDash val="solid"/>
+          </a:ln>
+        </p:spPr>
+        <p:txBody>
+          <a:bodyPr/>
+          <a:lstStyle/>
+          <a:p>
+            <a:endParaRPr lang="ja-JP" altLang="en-US"/>
+          </a:p>
+        </p:txBody>
+      </p:sp>
+      <p:sp>
+        <p:nvSpPr>
+          <p:cNvPr id="16" name="Text 14"/>
+          <p:cNvSpPr/>
+          <p:nvPr/>
+        </p:nvSpPr>
+        <p:spPr>
+          <a:xfrm>
+            <a:off x="6949440" y="2011680"/>
+            <a:ext cx="4251960" cy="411480"/>
+          </a:xfrm>
+          <a:prstGeom prst="rect">
+            <a:avLst/>
+          </a:prstGeom>
+          <a:noFill/>
+          <a:ln/>
+        </p:spPr>
+        <p:txBody>
+          <a:bodyPr wrap="square" lIns="0" tIns="0" rIns="0" bIns="0" rtlCol="0" anchor="ctr"/>
+          <a:lstStyle/>
+          <a:p>
+            <a:pPr marL="0" indent="0">
+              <a:buNone/>
+            </a:pPr>
+            <a:r>
+              <a:rPr lang="en-US" sz="2200" b="1" dirty="0">
+                <a:solidFill>
+                  <a:srgbClr val="326CE5"/>
+                </a:solidFill>
+                <a:latin typeface="Meiryo" pitchFamily="34" charset="0"/>
+                <a:ea typeface="Meiryo" pitchFamily="34" charset="-122"/>
+                <a:cs typeface="Meiryo" pitchFamily="34" charset="-120"/>
+              </a:rPr>
+              <a:t>Kubernetes</a:t>
+            </a:r>
+            <a:endParaRPr lang="en-US" sz="2200" dirty="0"/>
+          </a:p>
+        </p:txBody>
+      </p:sp>
+      <p:sp>
+        <p:nvSpPr>
+          <p:cNvPr id="17" name="Text 15"/>
+          <p:cNvSpPr/>
+          <p:nvPr/>
+        </p:nvSpPr>
+        <p:spPr>
+          <a:xfrm>
+            <a:off x="6949440" y="2468880"/>
+            <a:ext cx="4251960" cy="685800"/>
+          </a:xfrm>
+          <a:prstGeom prst="rect">
+            <a:avLst/>
+          </a:prstGeom>
+          <a:noFill/>
+          <a:ln/>
+        </p:spPr>
+        <p:txBody>
+          <a:bodyPr wrap="square" lIns="0" tIns="0" rIns="0" bIns="0" rtlCol="0" anchor="t"/>
+          <a:lstStyle/>
+          <a:p>
+            <a:pPr marL="0" indent="0">
+              <a:lnSpc>
+                <a:spcPts val="2000"/>
+              </a:lnSpc>
+              <a:buNone/>
+            </a:pPr>
+            <a:r>
+              <a:rPr lang="en-US" sz="1400" b="1" dirty="0" err="1">
+                <a:solidFill>
+                  <a:srgbClr val="0F2350"/>
+                </a:solidFill>
+                <a:latin typeface="Meiryo" pitchFamily="34" charset="0"/>
+                <a:ea typeface="Meiryo" pitchFamily="34" charset="-122"/>
+                <a:cs typeface="Meiryo" pitchFamily="34" charset="-120"/>
+              </a:rPr>
+              <a:t>複数台のホスト（node）に同じPodを</a:t>
+            </a:r>
+            <a:r>
+              <a:rPr lang="ja-JP" altLang="en-US" sz="1400" b="1" dirty="0">
+                <a:solidFill>
+                  <a:srgbClr val="0F2350"/>
+                </a:solidFill>
+                <a:latin typeface="Meiryo" pitchFamily="34" charset="0"/>
+                <a:ea typeface="Meiryo" pitchFamily="34" charset="-122"/>
+                <a:cs typeface="Meiryo" pitchFamily="34" charset="-120"/>
+              </a:rPr>
+              <a:t>配置し</a:t>
+            </a:r>
+            <a:r>
+              <a:rPr lang="en-US" sz="1400" b="1" dirty="0">
+                <a:solidFill>
+                  <a:srgbClr val="0F2350"/>
+                </a:solidFill>
+                <a:latin typeface="Meiryo" pitchFamily="34" charset="0"/>
+                <a:ea typeface="Meiryo" pitchFamily="34" charset="-122"/>
+                <a:cs typeface="Meiryo" pitchFamily="34" charset="-120"/>
+              </a:rPr>
+              <a:t>、</a:t>
+            </a:r>
+            <a:endParaRPr lang="en-US" sz="1400" dirty="0"/>
+          </a:p>
+          <a:p>
+            <a:pPr marL="0" indent="0">
+              <a:lnSpc>
+                <a:spcPts val="2000"/>
+              </a:lnSpc>
+              <a:buNone/>
+            </a:pPr>
+            <a:r>
+              <a:rPr lang="en-US" sz="1400" b="1" dirty="0">
+                <a:solidFill>
+                  <a:srgbClr val="0F2350"/>
+                </a:solidFill>
+                <a:latin typeface="Meiryo" pitchFamily="34" charset="0"/>
+                <a:ea typeface="Meiryo" pitchFamily="34" charset="-122"/>
+                <a:cs typeface="Meiryo" pitchFamily="34" charset="-120"/>
+              </a:rPr>
+              <a:t>冗長化して「どう動かし続けるか」</a:t>
+            </a:r>
+            <a:endParaRPr lang="en-US" sz="1400" dirty="0"/>
+          </a:p>
+        </p:txBody>
+      </p:sp>
+      <p:sp>
+        <p:nvSpPr>
+          <p:cNvPr id="18" name="Shape 16"/>
+          <p:cNvSpPr/>
+          <p:nvPr/>
+        </p:nvSpPr>
+        <p:spPr>
+          <a:xfrm>
+            <a:off x="7086600" y="3291840"/>
+            <a:ext cx="1280160" cy="1325880"/>
+          </a:xfrm>
+          <a:prstGeom prst="roundRect">
+            <a:avLst>
+              <a:gd name="adj" fmla="val 5714"/>
+            </a:avLst>
+          </a:prstGeom>
+          <a:solidFill>
+            <a:srgbClr val="FFFFFF"/>
+          </a:solidFill>
+          <a:ln w="15875">
+            <a:solidFill>
+              <a:srgbClr val="CFDEF8"/>
+            </a:solidFill>
+            <a:prstDash val="solid"/>
+          </a:ln>
+        </p:spPr>
+        <p:txBody>
+          <a:bodyPr/>
+          <a:lstStyle/>
+          <a:p>
+            <a:endParaRPr lang="ja-JP" altLang="en-US"/>
+          </a:p>
+        </p:txBody>
+      </p:sp>
+      <p:sp>
+        <p:nvSpPr>
+          <p:cNvPr id="19" name="Shape 17"/>
+          <p:cNvSpPr/>
+          <p:nvPr/>
+        </p:nvSpPr>
+        <p:spPr>
+          <a:xfrm>
+            <a:off x="7251192" y="3708400"/>
+            <a:ext cx="950976" cy="274320"/>
           </a:xfrm>
           <a:prstGeom prst="roundRect">
             <a:avLst>
@@ -12676,17 +13200,24 @@
             <a:prstDash val="solid"/>
           </a:ln>
         </p:spPr>
-      </p:sp>
-      <p:sp>
-        <p:nvSpPr>
-          <p:cNvPr id="11" name="Text 9"/>
-          <p:cNvSpPr/>
-          <p:nvPr/>
-        </p:nvSpPr>
-        <p:spPr>
-          <a:xfrm>
-            <a:off x="2496312" y="3822192"/>
-            <a:ext cx="1545336" cy="274320"/>
+        <p:txBody>
+          <a:bodyPr/>
+          <a:lstStyle/>
+          <a:p>
+            <a:endParaRPr lang="ja-JP" altLang="en-US"/>
+          </a:p>
+        </p:txBody>
+      </p:sp>
+      <p:sp>
+        <p:nvSpPr>
+          <p:cNvPr id="20" name="Text 18"/>
+          <p:cNvSpPr/>
+          <p:nvPr/>
+        </p:nvSpPr>
+        <p:spPr>
+          <a:xfrm>
+            <a:off x="7251192" y="3708400"/>
+            <a:ext cx="950976" cy="274320"/>
           </a:xfrm>
           <a:prstGeom prst="rect">
             <a:avLst/>
@@ -12718,14 +13249,14 @@
       </p:sp>
       <p:sp>
         <p:nvSpPr>
-          <p:cNvPr id="12" name="Text 10"/>
-          <p:cNvSpPr/>
-          <p:nvPr/>
-        </p:nvSpPr>
-        <p:spPr>
-          <a:xfrm>
-            <a:off x="2331720" y="4306824"/>
-            <a:ext cx="1874520" cy="256032"/>
+          <p:cNvPr id="23" name="Text 21"/>
+          <p:cNvSpPr/>
+          <p:nvPr/>
+        </p:nvSpPr>
+        <p:spPr>
+          <a:xfrm>
+            <a:off x="7086600" y="4306824"/>
+            <a:ext cx="1280160" cy="256032"/>
           </a:xfrm>
           <a:prstGeom prst="rect">
             <a:avLst/>
@@ -12749,7 +13280,7 @@
                 <a:ea typeface="Meiryo" pitchFamily="34" charset="-122"/>
                 <a:cs typeface="Meiryo" pitchFamily="34" charset="-120"/>
               </a:rPr>
-              <a:t>host（1台）</a:t>
+              <a:t>node</a:t>
             </a:r>
             <a:endParaRPr lang="en-US" sz="900" dirty="0"/>
           </a:p>
@@ -12757,242 +13288,13 @@
       </p:sp>
       <p:sp>
         <p:nvSpPr>
-          <p:cNvPr id="13" name="Text 11"/>
-          <p:cNvSpPr/>
-          <p:nvPr/>
-        </p:nvSpPr>
-        <p:spPr>
-          <a:xfrm>
-            <a:off x="960120" y="4800600"/>
-            <a:ext cx="4663440" cy="685800"/>
-          </a:xfrm>
-          <a:prstGeom prst="rect">
-            <a:avLst/>
-          </a:prstGeom>
-          <a:noFill/>
-          <a:ln/>
-        </p:spPr>
-        <p:txBody>
-          <a:bodyPr wrap="square" lIns="0" tIns="0" rIns="0" bIns="0" rtlCol="0" anchor="t"/>
-          <a:lstStyle/>
-          <a:p>
-            <a:pPr marL="0" indent="0">
-              <a:lnSpc>
-                <a:spcPts val="1900"/>
-              </a:lnSpc>
-              <a:buNone/>
-            </a:pPr>
-            <a:r>
-              <a:rPr lang="en-US" sz="1300" dirty="0">
-                <a:solidFill>
-                  <a:srgbClr val="5D6B85"/>
-                </a:solidFill>
-                <a:latin typeface="Meiryo" pitchFamily="34" charset="0"/>
-                <a:ea typeface="Meiryo" pitchFamily="34" charset="-122"/>
-                <a:cs typeface="Meiryo" pitchFamily="34" charset="-120"/>
-              </a:rPr>
-              <a:t>docker run した瞬間は動く。</a:t>
-            </a:r>
-            <a:endParaRPr lang="en-US" sz="1300" dirty="0"/>
-          </a:p>
-          <a:p>
-            <a:pPr marL="0" indent="0">
-              <a:lnSpc>
-                <a:spcPts val="1900"/>
-              </a:lnSpc>
-              <a:buNone/>
-            </a:pPr>
-            <a:r>
-              <a:rPr lang="en-US" sz="1300" dirty="0">
-                <a:solidFill>
-                  <a:srgbClr val="5D6B85"/>
-                </a:solidFill>
-                <a:latin typeface="Meiryo" pitchFamily="34" charset="0"/>
-                <a:ea typeface="Meiryo" pitchFamily="34" charset="-122"/>
-                <a:cs typeface="Meiryo" pitchFamily="34" charset="-120"/>
-              </a:rPr>
-              <a:t>その後のことは面倒を見てくれない。</a:t>
-            </a:r>
-            <a:endParaRPr lang="en-US" sz="1300" dirty="0"/>
-          </a:p>
-        </p:txBody>
-      </p:sp>
-      <p:sp>
-        <p:nvSpPr>
-          <p:cNvPr id="14" name="Text 12"/>
-          <p:cNvSpPr/>
-          <p:nvPr/>
-        </p:nvSpPr>
-        <p:spPr>
-          <a:xfrm>
-            <a:off x="5989320" y="3566160"/>
-            <a:ext cx="594360" cy="548640"/>
-          </a:xfrm>
-          <a:prstGeom prst="rect">
-            <a:avLst/>
-          </a:prstGeom>
-          <a:noFill/>
-          <a:ln/>
-        </p:spPr>
-        <p:txBody>
-          <a:bodyPr wrap="square" lIns="0" tIns="0" rIns="0" bIns="0" rtlCol="0" anchor="ctr"/>
-          <a:lstStyle/>
-          <a:p>
-            <a:pPr marL="0" indent="0" algn="ctr">
-              <a:buNone/>
-            </a:pPr>
-            <a:r>
-              <a:rPr lang="en-US" sz="3000" b="1" dirty="0">
-                <a:solidFill>
-                  <a:srgbClr val="326CE5"/>
-                </a:solidFill>
-                <a:latin typeface="Meiryo" pitchFamily="34" charset="0"/>
-                <a:ea typeface="Meiryo" pitchFamily="34" charset="-122"/>
-                <a:cs typeface="Meiryo" pitchFamily="34" charset="-120"/>
-              </a:rPr>
-              <a:t>→</a:t>
-            </a:r>
-            <a:endParaRPr lang="en-US" sz="3000" dirty="0"/>
-          </a:p>
-        </p:txBody>
-      </p:sp>
-      <p:sp>
-        <p:nvSpPr>
-          <p:cNvPr id="15" name="Shape 13"/>
-          <p:cNvSpPr/>
-          <p:nvPr/>
-        </p:nvSpPr>
-        <p:spPr>
-          <a:xfrm>
-            <a:off x="6629400" y="1783080"/>
-            <a:ext cx="4892040" cy="4023360"/>
-          </a:xfrm>
-          <a:prstGeom prst="roundRect">
-            <a:avLst>
-              <a:gd name="adj" fmla="val 1364"/>
-            </a:avLst>
-          </a:prstGeom>
-          <a:solidFill>
-            <a:srgbClr val="E8EEF9"/>
-          </a:solidFill>
-          <a:ln w="12700">
-            <a:solidFill>
-              <a:srgbClr val="E8EEF9"/>
-            </a:solidFill>
-            <a:prstDash val="solid"/>
-          </a:ln>
-        </p:spPr>
-      </p:sp>
-      <p:sp>
-        <p:nvSpPr>
-          <p:cNvPr id="16" name="Text 14"/>
-          <p:cNvSpPr/>
-          <p:nvPr/>
-        </p:nvSpPr>
-        <p:spPr>
-          <a:xfrm>
-            <a:off x="6949440" y="2011680"/>
-            <a:ext cx="4251960" cy="411480"/>
-          </a:xfrm>
-          <a:prstGeom prst="rect">
-            <a:avLst/>
-          </a:prstGeom>
-          <a:noFill/>
-          <a:ln/>
-        </p:spPr>
-        <p:txBody>
-          <a:bodyPr wrap="square" lIns="0" tIns="0" rIns="0" bIns="0" rtlCol="0" anchor="ctr"/>
-          <a:lstStyle/>
-          <a:p>
-            <a:pPr marL="0" indent="0">
-              <a:buNone/>
-            </a:pPr>
-            <a:r>
-              <a:rPr lang="en-US" sz="2200" b="1" dirty="0">
-                <a:solidFill>
-                  <a:srgbClr val="326CE5"/>
-                </a:solidFill>
-                <a:latin typeface="Meiryo" pitchFamily="34" charset="0"/>
-                <a:ea typeface="Meiryo" pitchFamily="34" charset="-122"/>
-                <a:cs typeface="Meiryo" pitchFamily="34" charset="-120"/>
-              </a:rPr>
-              <a:t>Kubernetes</a:t>
-            </a:r>
-            <a:endParaRPr lang="en-US" sz="2200" dirty="0"/>
-          </a:p>
-        </p:txBody>
-      </p:sp>
-      <p:sp>
-        <p:nvSpPr>
-          <p:cNvPr id="17" name="Text 15"/>
-          <p:cNvSpPr/>
-          <p:nvPr/>
-        </p:nvSpPr>
-        <p:spPr>
-          <a:xfrm>
-            <a:off x="6949440" y="2468880"/>
-            <a:ext cx="4251960" cy="685800"/>
-          </a:xfrm>
-          <a:prstGeom prst="rect">
-            <a:avLst/>
-          </a:prstGeom>
-          <a:noFill/>
-          <a:ln/>
-        </p:spPr>
-        <p:txBody>
-          <a:bodyPr wrap="square" lIns="0" tIns="0" rIns="0" bIns="0" rtlCol="0" anchor="t"/>
-          <a:lstStyle/>
-          <a:p>
-            <a:pPr marL="0" indent="0">
-              <a:lnSpc>
-                <a:spcPts val="2000"/>
-              </a:lnSpc>
-              <a:buNone/>
-            </a:pPr>
-            <a:r>
-              <a:rPr lang="en-US" sz="1400" b="1" dirty="0">
-                <a:solidFill>
-                  <a:srgbClr val="0F2350"/>
-                </a:solidFill>
-                <a:latin typeface="Meiryo" pitchFamily="34" charset="0"/>
-                <a:ea typeface="Meiryo" pitchFamily="34" charset="-122"/>
-                <a:cs typeface="Meiryo" pitchFamily="34" charset="-120"/>
-              </a:rPr>
-              <a:t>複数台のホストで、多数のコンテナを</a:t>
-            </a:r>
-            <a:endParaRPr lang="en-US" sz="1400" dirty="0"/>
-          </a:p>
-          <a:p>
-            <a:pPr marL="0" indent="0">
-              <a:lnSpc>
-                <a:spcPts val="2000"/>
-              </a:lnSpc>
-              <a:buNone/>
-            </a:pPr>
-            <a:r>
-              <a:rPr lang="en-US" sz="1400" b="1" dirty="0">
-                <a:solidFill>
-                  <a:srgbClr val="0F2350"/>
-                </a:solidFill>
-                <a:latin typeface="Meiryo" pitchFamily="34" charset="0"/>
-                <a:ea typeface="Meiryo" pitchFamily="34" charset="-122"/>
-                <a:cs typeface="Meiryo" pitchFamily="34" charset="-120"/>
-              </a:rPr>
-              <a:t>「どう動かし続けるか」</a:t>
-            </a:r>
-            <a:endParaRPr lang="en-US" sz="1400" dirty="0"/>
-          </a:p>
-        </p:txBody>
-      </p:sp>
-      <p:sp>
-        <p:nvSpPr>
-          <p:cNvPr id="18" name="Shape 16"/>
-          <p:cNvSpPr/>
-          <p:nvPr/>
-        </p:nvSpPr>
-        <p:spPr>
-          <a:xfrm>
-            <a:off x="7086600" y="3291840"/>
+          <p:cNvPr id="24" name="Shape 22"/>
+          <p:cNvSpPr/>
+          <p:nvPr/>
+        </p:nvSpPr>
+        <p:spPr>
+          <a:xfrm>
+            <a:off x="8503920" y="3291840"/>
             <a:ext cx="1280160" cy="1325880"/>
           </a:xfrm>
           <a:prstGeom prst="roundRect">
@@ -13010,16 +13312,23 @@
             <a:prstDash val="solid"/>
           </a:ln>
         </p:spPr>
-      </p:sp>
-      <p:sp>
-        <p:nvSpPr>
-          <p:cNvPr id="19" name="Shape 17"/>
-          <p:cNvSpPr/>
-          <p:nvPr/>
-        </p:nvSpPr>
-        <p:spPr>
-          <a:xfrm>
-            <a:off x="7251192" y="3438144"/>
+        <p:txBody>
+          <a:bodyPr/>
+          <a:lstStyle/>
+          <a:p>
+            <a:endParaRPr lang="ja-JP" altLang="en-US"/>
+          </a:p>
+        </p:txBody>
+      </p:sp>
+      <p:sp>
+        <p:nvSpPr>
+          <p:cNvPr id="25" name="Shape 23"/>
+          <p:cNvSpPr/>
+          <p:nvPr/>
+        </p:nvSpPr>
+        <p:spPr>
+          <a:xfrm>
+            <a:off x="8668512" y="3708400"/>
             <a:ext cx="950976" cy="274320"/>
           </a:xfrm>
           <a:prstGeom prst="roundRect">
@@ -13037,16 +13346,23 @@
             <a:prstDash val="solid"/>
           </a:ln>
         </p:spPr>
-      </p:sp>
-      <p:sp>
-        <p:nvSpPr>
-          <p:cNvPr id="20" name="Text 18"/>
-          <p:cNvSpPr/>
-          <p:nvPr/>
-        </p:nvSpPr>
-        <p:spPr>
-          <a:xfrm>
-            <a:off x="7251192" y="3438144"/>
+        <p:txBody>
+          <a:bodyPr/>
+          <a:lstStyle/>
+          <a:p>
+            <a:endParaRPr lang="ja-JP" altLang="en-US"/>
+          </a:p>
+        </p:txBody>
+      </p:sp>
+      <p:sp>
+        <p:nvSpPr>
+          <p:cNvPr id="26" name="Text 24"/>
+          <p:cNvSpPr/>
+          <p:nvPr/>
+        </p:nvSpPr>
+        <p:spPr>
+          <a:xfrm>
+            <a:off x="8668512" y="3708400"/>
             <a:ext cx="950976" cy="274320"/>
           </a:xfrm>
           <a:prstGeom prst="rect">
@@ -13079,13 +13395,86 @@
       </p:sp>
       <p:sp>
         <p:nvSpPr>
-          <p:cNvPr id="21" name="Shape 19"/>
-          <p:cNvSpPr/>
-          <p:nvPr/>
-        </p:nvSpPr>
-        <p:spPr>
-          <a:xfrm>
-            <a:off x="7251192" y="3822192"/>
+          <p:cNvPr id="29" name="Text 27"/>
+          <p:cNvSpPr/>
+          <p:nvPr/>
+        </p:nvSpPr>
+        <p:spPr>
+          <a:xfrm>
+            <a:off x="8503920" y="4306824"/>
+            <a:ext cx="1280160" cy="256032"/>
+          </a:xfrm>
+          <a:prstGeom prst="rect">
+            <a:avLst/>
+          </a:prstGeom>
+          <a:noFill/>
+          <a:ln/>
+        </p:spPr>
+        <p:txBody>
+          <a:bodyPr wrap="square" lIns="0" tIns="0" rIns="0" bIns="0" rtlCol="0" anchor="ctr"/>
+          <a:lstStyle/>
+          <a:p>
+            <a:pPr marL="0" indent="0" algn="ctr">
+              <a:buNone/>
+            </a:pPr>
+            <a:r>
+              <a:rPr lang="en-US" sz="900" dirty="0">
+                <a:solidFill>
+                  <a:srgbClr val="5D6B85"/>
+                </a:solidFill>
+                <a:latin typeface="Meiryo" pitchFamily="34" charset="0"/>
+                <a:ea typeface="Meiryo" pitchFamily="34" charset="-122"/>
+                <a:cs typeface="Meiryo" pitchFamily="34" charset="-120"/>
+              </a:rPr>
+              <a:t>node</a:t>
+            </a:r>
+            <a:endParaRPr lang="en-US" sz="900" dirty="0"/>
+          </a:p>
+        </p:txBody>
+      </p:sp>
+      <p:sp>
+        <p:nvSpPr>
+          <p:cNvPr id="30" name="Shape 28"/>
+          <p:cNvSpPr/>
+          <p:nvPr/>
+        </p:nvSpPr>
+        <p:spPr>
+          <a:xfrm>
+            <a:off x="9921240" y="3291840"/>
+            <a:ext cx="1280160" cy="1325880"/>
+          </a:xfrm>
+          <a:prstGeom prst="roundRect">
+            <a:avLst>
+              <a:gd name="adj" fmla="val 5714"/>
+            </a:avLst>
+          </a:prstGeom>
+          <a:solidFill>
+            <a:srgbClr val="FFFFFF"/>
+          </a:solidFill>
+          <a:ln w="15875">
+            <a:solidFill>
+              <a:srgbClr val="CFDEF8"/>
+            </a:solidFill>
+            <a:prstDash val="solid"/>
+          </a:ln>
+        </p:spPr>
+        <p:txBody>
+          <a:bodyPr/>
+          <a:lstStyle/>
+          <a:p>
+            <a:endParaRPr lang="ja-JP" altLang="en-US"/>
+          </a:p>
+        </p:txBody>
+      </p:sp>
+      <p:sp>
+        <p:nvSpPr>
+          <p:cNvPr id="31" name="Shape 29"/>
+          <p:cNvSpPr/>
+          <p:nvPr/>
+        </p:nvSpPr>
+        <p:spPr>
+          <a:xfrm>
+            <a:off x="10085832" y="3708400"/>
             <a:ext cx="950976" cy="274320"/>
           </a:xfrm>
           <a:prstGeom prst="roundRect">
@@ -13103,336 +13492,13 @@
             <a:prstDash val="solid"/>
           </a:ln>
         </p:spPr>
-      </p:sp>
-      <p:sp>
-        <p:nvSpPr>
-          <p:cNvPr id="22" name="Text 20"/>
-          <p:cNvSpPr/>
-          <p:nvPr/>
-        </p:nvSpPr>
-        <p:spPr>
-          <a:xfrm>
-            <a:off x="7251192" y="3822192"/>
-            <a:ext cx="950976" cy="274320"/>
-          </a:xfrm>
-          <a:prstGeom prst="rect">
-            <a:avLst/>
-          </a:prstGeom>
-          <a:noFill/>
-          <a:ln/>
-        </p:spPr>
-        <p:txBody>
-          <a:bodyPr wrap="square" lIns="0" tIns="0" rIns="0" bIns="0" rtlCol="0" anchor="ctr"/>
-          <a:lstStyle/>
-          <a:p>
-            <a:pPr marL="0" indent="0" algn="ctr">
-              <a:buNone/>
-            </a:pPr>
-            <a:r>
-              <a:rPr lang="en-US" sz="900" b="1" dirty="0">
-                <a:solidFill>
-                  <a:srgbClr val="FFFFFF"/>
-                </a:solidFill>
-                <a:latin typeface="Meiryo" pitchFamily="34" charset="0"/>
-                <a:ea typeface="Meiryo" pitchFamily="34" charset="-122"/>
-                <a:cs typeface="Meiryo" pitchFamily="34" charset="-120"/>
-              </a:rPr>
-              <a:t>Pod</a:t>
-            </a:r>
-            <a:endParaRPr lang="en-US" sz="900" dirty="0"/>
-          </a:p>
-        </p:txBody>
-      </p:sp>
-      <p:sp>
-        <p:nvSpPr>
-          <p:cNvPr id="23" name="Text 21"/>
-          <p:cNvSpPr/>
-          <p:nvPr/>
-        </p:nvSpPr>
-        <p:spPr>
-          <a:xfrm>
-            <a:off x="7086600" y="4306824"/>
-            <a:ext cx="1280160" cy="256032"/>
-          </a:xfrm>
-          <a:prstGeom prst="rect">
-            <a:avLst/>
-          </a:prstGeom>
-          <a:noFill/>
-          <a:ln/>
-        </p:spPr>
-        <p:txBody>
-          <a:bodyPr wrap="square" lIns="0" tIns="0" rIns="0" bIns="0" rtlCol="0" anchor="ctr"/>
-          <a:lstStyle/>
-          <a:p>
-            <a:pPr marL="0" indent="0" algn="ctr">
-              <a:buNone/>
-            </a:pPr>
-            <a:r>
-              <a:rPr lang="en-US" sz="900" dirty="0">
-                <a:solidFill>
-                  <a:srgbClr val="5D6B85"/>
-                </a:solidFill>
-                <a:latin typeface="Meiryo" pitchFamily="34" charset="0"/>
-                <a:ea typeface="Meiryo" pitchFamily="34" charset="-122"/>
-                <a:cs typeface="Meiryo" pitchFamily="34" charset="-120"/>
-              </a:rPr>
-              <a:t>node</a:t>
-            </a:r>
-            <a:endParaRPr lang="en-US" sz="900" dirty="0"/>
-          </a:p>
-        </p:txBody>
-      </p:sp>
-      <p:sp>
-        <p:nvSpPr>
-          <p:cNvPr id="24" name="Shape 22"/>
-          <p:cNvSpPr/>
-          <p:nvPr/>
-        </p:nvSpPr>
-        <p:spPr>
-          <a:xfrm>
-            <a:off x="8503920" y="3291840"/>
-            <a:ext cx="1280160" cy="1325880"/>
-          </a:xfrm>
-          <a:prstGeom prst="roundRect">
-            <a:avLst>
-              <a:gd name="adj" fmla="val 5714"/>
-            </a:avLst>
-          </a:prstGeom>
-          <a:solidFill>
-            <a:srgbClr val="FFFFFF"/>
-          </a:solidFill>
-          <a:ln w="15875">
-            <a:solidFill>
-              <a:srgbClr val="CFDEF8"/>
-            </a:solidFill>
-            <a:prstDash val="solid"/>
-          </a:ln>
-        </p:spPr>
-      </p:sp>
-      <p:sp>
-        <p:nvSpPr>
-          <p:cNvPr id="25" name="Shape 23"/>
-          <p:cNvSpPr/>
-          <p:nvPr/>
-        </p:nvSpPr>
-        <p:spPr>
-          <a:xfrm>
-            <a:off x="8668512" y="3438144"/>
-            <a:ext cx="950976" cy="274320"/>
-          </a:xfrm>
-          <a:prstGeom prst="roundRect">
-            <a:avLst>
-              <a:gd name="adj" fmla="val 33333"/>
-            </a:avLst>
-          </a:prstGeom>
-          <a:solidFill>
-            <a:srgbClr val="326CE5"/>
-          </a:solidFill>
-          <a:ln w="12700">
-            <a:solidFill>
-              <a:srgbClr val="326CE5"/>
-            </a:solidFill>
-            <a:prstDash val="solid"/>
-          </a:ln>
-        </p:spPr>
-      </p:sp>
-      <p:sp>
-        <p:nvSpPr>
-          <p:cNvPr id="26" name="Text 24"/>
-          <p:cNvSpPr/>
-          <p:nvPr/>
-        </p:nvSpPr>
-        <p:spPr>
-          <a:xfrm>
-            <a:off x="8668512" y="3438144"/>
-            <a:ext cx="950976" cy="274320"/>
-          </a:xfrm>
-          <a:prstGeom prst="rect">
-            <a:avLst/>
-          </a:prstGeom>
-          <a:noFill/>
-          <a:ln/>
-        </p:spPr>
-        <p:txBody>
-          <a:bodyPr wrap="square" lIns="0" tIns="0" rIns="0" bIns="0" rtlCol="0" anchor="ctr"/>
-          <a:lstStyle/>
-          <a:p>
-            <a:pPr marL="0" indent="0" algn="ctr">
-              <a:buNone/>
-            </a:pPr>
-            <a:r>
-              <a:rPr lang="en-US" sz="900" b="1" dirty="0">
-                <a:solidFill>
-                  <a:srgbClr val="FFFFFF"/>
-                </a:solidFill>
-                <a:latin typeface="Meiryo" pitchFamily="34" charset="0"/>
-                <a:ea typeface="Meiryo" pitchFamily="34" charset="-122"/>
-                <a:cs typeface="Meiryo" pitchFamily="34" charset="-120"/>
-              </a:rPr>
-              <a:t>Pod</a:t>
-            </a:r>
-            <a:endParaRPr lang="en-US" sz="900" dirty="0"/>
-          </a:p>
-        </p:txBody>
-      </p:sp>
-      <p:sp>
-        <p:nvSpPr>
-          <p:cNvPr id="27" name="Shape 25"/>
-          <p:cNvSpPr/>
-          <p:nvPr/>
-        </p:nvSpPr>
-        <p:spPr>
-          <a:xfrm>
-            <a:off x="8668512" y="3822192"/>
-            <a:ext cx="950976" cy="274320"/>
-          </a:xfrm>
-          <a:prstGeom prst="roundRect">
-            <a:avLst>
-              <a:gd name="adj" fmla="val 33333"/>
-            </a:avLst>
-          </a:prstGeom>
-          <a:solidFill>
-            <a:srgbClr val="326CE5"/>
-          </a:solidFill>
-          <a:ln w="12700">
-            <a:solidFill>
-              <a:srgbClr val="326CE5"/>
-            </a:solidFill>
-            <a:prstDash val="solid"/>
-          </a:ln>
-        </p:spPr>
-      </p:sp>
-      <p:sp>
-        <p:nvSpPr>
-          <p:cNvPr id="28" name="Text 26"/>
-          <p:cNvSpPr/>
-          <p:nvPr/>
-        </p:nvSpPr>
-        <p:spPr>
-          <a:xfrm>
-            <a:off x="8668512" y="3822192"/>
-            <a:ext cx="950976" cy="274320"/>
-          </a:xfrm>
-          <a:prstGeom prst="rect">
-            <a:avLst/>
-          </a:prstGeom>
-          <a:noFill/>
-          <a:ln/>
-        </p:spPr>
-        <p:txBody>
-          <a:bodyPr wrap="square" lIns="0" tIns="0" rIns="0" bIns="0" rtlCol="0" anchor="ctr"/>
-          <a:lstStyle/>
-          <a:p>
-            <a:pPr marL="0" indent="0" algn="ctr">
-              <a:buNone/>
-            </a:pPr>
-            <a:r>
-              <a:rPr lang="en-US" sz="900" b="1" dirty="0">
-                <a:solidFill>
-                  <a:srgbClr val="FFFFFF"/>
-                </a:solidFill>
-                <a:latin typeface="Meiryo" pitchFamily="34" charset="0"/>
-                <a:ea typeface="Meiryo" pitchFamily="34" charset="-122"/>
-                <a:cs typeface="Meiryo" pitchFamily="34" charset="-120"/>
-              </a:rPr>
-              <a:t>Pod</a:t>
-            </a:r>
-            <a:endParaRPr lang="en-US" sz="900" dirty="0"/>
-          </a:p>
-        </p:txBody>
-      </p:sp>
-      <p:sp>
-        <p:nvSpPr>
-          <p:cNvPr id="29" name="Text 27"/>
-          <p:cNvSpPr/>
-          <p:nvPr/>
-        </p:nvSpPr>
-        <p:spPr>
-          <a:xfrm>
-            <a:off x="8503920" y="4306824"/>
-            <a:ext cx="1280160" cy="256032"/>
-          </a:xfrm>
-          <a:prstGeom prst="rect">
-            <a:avLst/>
-          </a:prstGeom>
-          <a:noFill/>
-          <a:ln/>
-        </p:spPr>
-        <p:txBody>
-          <a:bodyPr wrap="square" lIns="0" tIns="0" rIns="0" bIns="0" rtlCol="0" anchor="ctr"/>
-          <a:lstStyle/>
-          <a:p>
-            <a:pPr marL="0" indent="0" algn="ctr">
-              <a:buNone/>
-            </a:pPr>
-            <a:r>
-              <a:rPr lang="en-US" sz="900" dirty="0">
-                <a:solidFill>
-                  <a:srgbClr val="5D6B85"/>
-                </a:solidFill>
-                <a:latin typeface="Meiryo" pitchFamily="34" charset="0"/>
-                <a:ea typeface="Meiryo" pitchFamily="34" charset="-122"/>
-                <a:cs typeface="Meiryo" pitchFamily="34" charset="-120"/>
-              </a:rPr>
-              <a:t>node</a:t>
-            </a:r>
-            <a:endParaRPr lang="en-US" sz="900" dirty="0"/>
-          </a:p>
-        </p:txBody>
-      </p:sp>
-      <p:sp>
-        <p:nvSpPr>
-          <p:cNvPr id="30" name="Shape 28"/>
-          <p:cNvSpPr/>
-          <p:nvPr/>
-        </p:nvSpPr>
-        <p:spPr>
-          <a:xfrm>
-            <a:off x="9921240" y="3291840"/>
-            <a:ext cx="1280160" cy="1325880"/>
-          </a:xfrm>
-          <a:prstGeom prst="roundRect">
-            <a:avLst>
-              <a:gd name="adj" fmla="val 5714"/>
-            </a:avLst>
-          </a:prstGeom>
-          <a:solidFill>
-            <a:srgbClr val="FFFFFF"/>
-          </a:solidFill>
-          <a:ln w="15875">
-            <a:solidFill>
-              <a:srgbClr val="CFDEF8"/>
-            </a:solidFill>
-            <a:prstDash val="solid"/>
-          </a:ln>
-        </p:spPr>
-      </p:sp>
-      <p:sp>
-        <p:nvSpPr>
-          <p:cNvPr id="31" name="Shape 29"/>
-          <p:cNvSpPr/>
-          <p:nvPr/>
-        </p:nvSpPr>
-        <p:spPr>
-          <a:xfrm>
-            <a:off x="10085832" y="3438144"/>
-            <a:ext cx="950976" cy="274320"/>
-          </a:xfrm>
-          <a:prstGeom prst="roundRect">
-            <a:avLst>
-              <a:gd name="adj" fmla="val 33333"/>
-            </a:avLst>
-          </a:prstGeom>
-          <a:solidFill>
-            <a:srgbClr val="326CE5"/>
-          </a:solidFill>
-          <a:ln w="12700">
-            <a:solidFill>
-              <a:srgbClr val="326CE5"/>
-            </a:solidFill>
-            <a:prstDash val="solid"/>
-          </a:ln>
-        </p:spPr>
+        <p:txBody>
+          <a:bodyPr/>
+          <a:lstStyle/>
+          <a:p>
+            <a:endParaRPr lang="ja-JP" altLang="en-US"/>
+          </a:p>
+        </p:txBody>
       </p:sp>
       <p:sp>
         <p:nvSpPr>
@@ -13442,73 +13508,7 @@
         </p:nvSpPr>
         <p:spPr>
           <a:xfrm>
-            <a:off x="10085832" y="3438144"/>
-            <a:ext cx="950976" cy="274320"/>
-          </a:xfrm>
-          <a:prstGeom prst="rect">
-            <a:avLst/>
-          </a:prstGeom>
-          <a:noFill/>
-          <a:ln/>
-        </p:spPr>
-        <p:txBody>
-          <a:bodyPr wrap="square" lIns="0" tIns="0" rIns="0" bIns="0" rtlCol="0" anchor="ctr"/>
-          <a:lstStyle/>
-          <a:p>
-            <a:pPr marL="0" indent="0" algn="ctr">
-              <a:buNone/>
-            </a:pPr>
-            <a:r>
-              <a:rPr lang="en-US" sz="900" b="1" dirty="0">
-                <a:solidFill>
-                  <a:srgbClr val="FFFFFF"/>
-                </a:solidFill>
-                <a:latin typeface="Meiryo" pitchFamily="34" charset="0"/>
-                <a:ea typeface="Meiryo" pitchFamily="34" charset="-122"/>
-                <a:cs typeface="Meiryo" pitchFamily="34" charset="-120"/>
-              </a:rPr>
-              <a:t>Pod</a:t>
-            </a:r>
-            <a:endParaRPr lang="en-US" sz="900" dirty="0"/>
-          </a:p>
-        </p:txBody>
-      </p:sp>
-      <p:sp>
-        <p:nvSpPr>
-          <p:cNvPr id="33" name="Shape 31"/>
-          <p:cNvSpPr/>
-          <p:nvPr/>
-        </p:nvSpPr>
-        <p:spPr>
-          <a:xfrm>
-            <a:off x="10085832" y="3822192"/>
-            <a:ext cx="950976" cy="274320"/>
-          </a:xfrm>
-          <a:prstGeom prst="roundRect">
-            <a:avLst>
-              <a:gd name="adj" fmla="val 33333"/>
-            </a:avLst>
-          </a:prstGeom>
-          <a:solidFill>
-            <a:srgbClr val="326CE5"/>
-          </a:solidFill>
-          <a:ln w="12700">
-            <a:solidFill>
-              <a:srgbClr val="326CE5"/>
-            </a:solidFill>
-            <a:prstDash val="solid"/>
-          </a:ln>
-        </p:spPr>
-      </p:sp>
-      <p:sp>
-        <p:nvSpPr>
-          <p:cNvPr id="34" name="Text 32"/>
-          <p:cNvSpPr/>
-          <p:nvPr/>
-        </p:nvSpPr>
-        <p:spPr>
-          <a:xfrm>
-            <a:off x="10085832" y="3822192"/>
+            <a:off x="10085832" y="3708400"/>
             <a:ext cx="950976" cy="274320"/>
           </a:xfrm>
           <a:prstGeom prst="rect">
@@ -13614,7 +13614,7 @@
                 <a:ea typeface="Meiryo" pitchFamily="34" charset="-122"/>
                 <a:cs typeface="Meiryo" pitchFamily="34" charset="-120"/>
               </a:rPr>
-              <a:t>落ちたら？負荷が増えたら？</a:t>
+              <a:t>1つ落ちても他のPodが受ける。混んだら増やす。</a:t>
             </a:r>
             <a:endParaRPr lang="en-US" sz="1300" dirty="0"/>
           </a:p>
@@ -13640,7 +13640,51 @@
           </a:p>
         </p:txBody>
       </p:sp>
+      <p:sp>
+        <p:nvSpPr>
+          <p:cNvPr id="120" name="Text Mapping"/>
+          <p:cNvSpPr txBox="1"/>
+          <p:nvPr/>
+        </p:nvSpPr>
+        <p:spPr>
+          <a:xfrm>
+            <a:off x="635000" y="6019800"/>
+            <a:ext cx="10883900" cy="330200"/>
+          </a:xfrm>
+          <a:prstGeom prst="rect">
+            <a:avLst/>
+          </a:prstGeom>
+          <a:noFill/>
+        </p:spPr>
+        <p:txBody>
+          <a:bodyPr wrap="square" lIns="0" tIns="0" rIns="0" bIns="0" anchor="ctr">
+            <a:noAutofit/>
+          </a:bodyPr>
+          <a:lstStyle/>
+          <a:p>
+            <a:pPr marL="0" indent="0">
+              <a:buNone/>
+            </a:pPr>
+            <a:r>
+              <a:rPr lang="en-US" sz="1200" dirty="0">
+                <a:solidFill>
+                  <a:srgbClr val="5D6B85"/>
+                </a:solidFill>
+                <a:latin typeface="Meiryo" pitchFamily="34" charset="0"/>
+                <a:ea typeface="Meiryo" pitchFamily="34" charset="-122"/>
+                <a:cs typeface="Meiryo" pitchFamily="34" charset="-120"/>
+              </a:rPr>
+              <a:t>用語の対応： container → Pod（1つ以上のコンテナをまとめた最小実行単位） ／ host → node</a:t>
+            </a:r>
+          </a:p>
+        </p:txBody>
+      </p:sp>
     </p:spTree>
+    <p:extLst>
+      <p:ext uri="{BB962C8B-B14F-4D97-AF65-F5344CB8AC3E}">
+        <p14:creationId xmlns:p14="http://schemas.microsoft.com/office/powerpoint/2010/main" val="4050343430"/>
+      </p:ext>
+    </p:extLst>
   </p:cSld>
   <p:clrMapOvr>
     <a:masterClrMapping/>
@@ -14487,7 +14531,7 @@
                 <a:ea typeface="Meiryo" pitchFamily="34" charset="-122"/>
                 <a:cs typeface="Meiryo" pitchFamily="34" charset="-120"/>
               </a:rPr>
-              <a:t>課題への回答としてのコンセプト ── 信頼性をどこに置くか</a:t>
+              <a:t>課題への回答としてのコンセプト ── 信頼性をどこに置くか、そして台数でどう支えるか</a:t>
             </a:r>
             <a:endParaRPr lang="en-US" sz="1350" dirty="0"/>
           </a:p>
@@ -14519,6 +14563,13 @@
             <a:prstDash val="solid"/>
           </a:ln>
         </p:spPr>
+        <p:txBody>
+          <a:bodyPr/>
+          <a:lstStyle/>
+          <a:p>
+            <a:endParaRPr lang="ja-JP" altLang="en-US"/>
+          </a:p>
+        </p:txBody>
       </p:sp>
       <p:sp>
         <p:nvSpPr>
@@ -14728,6 +14779,13 @@
             <a:prstDash val="solid"/>
           </a:ln>
         </p:spPr>
+        <p:txBody>
+          <a:bodyPr/>
+          <a:lstStyle/>
+          <a:p>
+            <a:endParaRPr lang="ja-JP" altLang="en-US"/>
+          </a:p>
+        </p:txBody>
       </p:sp>
       <p:sp>
         <p:nvSpPr>
@@ -14918,6 +14976,13 @@
             <a:prstDash val="solid"/>
           </a:ln>
         </p:spPr>
+        <p:txBody>
+          <a:bodyPr/>
+          <a:lstStyle/>
+          <a:p>
+            <a:endParaRPr lang="ja-JP" altLang="en-US"/>
+          </a:p>
+        </p:txBody>
       </p:sp>
       <p:sp>
         <p:nvSpPr>
@@ -14938,6 +15003,13 @@
           </a:solidFill>
           <a:ln/>
         </p:spPr>
+        <p:txBody>
+          <a:bodyPr/>
+          <a:lstStyle/>
+          <a:p>
+            <a:endParaRPr lang="ja-JP" altLang="en-US"/>
+          </a:p>
+        </p:txBody>
       </p:sp>
       <p:sp>
         <p:nvSpPr>
@@ -15011,7 +15083,7 @@
                 <a:ea typeface="Meiryo" pitchFamily="34" charset="-122"/>
                 <a:cs typeface="Meiryo" pitchFamily="34" charset="-120"/>
               </a:rPr>
-              <a:t>そしてもう一つの副産物：スケールアウト</a:t>
+              <a:t>同じ仕組みが、そのままスケールアウトになる</a:t>
             </a:r>
             <a:endParaRPr lang="en-US" sz="1700" dirty="0"/>
           </a:p>
@@ -15039,6 +15111,9 @@
           <a:lstStyle/>
           <a:p>
             <a:pPr marL="0" indent="0">
+              <a:lnSpc>
+                <a:spcPts val="1900"/>
+              </a:lnSpc>
               <a:buNone/>
             </a:pPr>
             <a:r>
@@ -15050,13 +15125,18 @@
                 <a:ea typeface="Meiryo" pitchFamily="34" charset="-122"/>
                 <a:cs typeface="Meiryo" pitchFamily="34" charset="-120"/>
               </a:rPr>
-              <a:t>個々のホストのスペックは低くてよく、代わりにどんどん増やせる。増やした分だけコンテナも増やせる。</a:t>
+              <a:t>1台1台は使い捨てで、台数で支える。だから増やせば冗長性も処理能力も上がり、減らせばコストが下がる。</a:t>
             </a:r>
             <a:endParaRPr lang="en-US" sz="1400" dirty="0"/>
           </a:p>
         </p:txBody>
       </p:sp>
     </p:spTree>
+    <p:extLst>
+      <p:ext uri="{BB962C8B-B14F-4D97-AF65-F5344CB8AC3E}">
+        <p14:creationId xmlns:p14="http://schemas.microsoft.com/office/powerpoint/2010/main" val="3045258527"/>
+      </p:ext>
+    </p:extLst>
   </p:cSld>
   <p:clrMapOvr>
     <a:masterClrMapping/>

--- a/00Intro/slides/kubernetes-intro.pptx
+++ b/00Intro/slides/kubernetes-intro.pptx
@@ -9438,7 +9438,51 @@
                 <a:ea typeface="Meiryo" pitchFamily="34" charset="-122"/>
                 <a:cs typeface="Meiryo" pitchFamily="34" charset="-120"/>
               </a:rPr>
-              <a:t>一言でいえば ── 「落ちないサーバ」を諦めて、</a:t>
+              <a:t>一言でいえば ── 「</a:t>
+            </a:r>
+            <a:r>
+              <a:rPr lang="en-US" sz="1800" b="1" dirty="0" err="1">
+                <a:solidFill>
+                  <a:srgbClr val="FFFFFF"/>
+                </a:solidFill>
+                <a:latin typeface="Meiryo" pitchFamily="34" charset="0"/>
+                <a:ea typeface="Meiryo" pitchFamily="34" charset="-122"/>
+                <a:cs typeface="Meiryo" pitchFamily="34" charset="-120"/>
+              </a:rPr>
+              <a:t>落ちないサーバ</a:t>
+            </a:r>
+            <a:r>
+              <a:rPr lang="en-US" sz="1800" b="1" dirty="0">
+                <a:solidFill>
+                  <a:srgbClr val="FFFFFF"/>
+                </a:solidFill>
+                <a:latin typeface="Meiryo" pitchFamily="34" charset="0"/>
+                <a:ea typeface="Meiryo" pitchFamily="34" charset="-122"/>
+                <a:cs typeface="Meiryo" pitchFamily="34" charset="-120"/>
+              </a:rPr>
+              <a:t>」</a:t>
+            </a:r>
+            <a:r>
+              <a:rPr lang="ja-JP" altLang="en-US" b="1" dirty="0">
+                <a:solidFill>
+                  <a:srgbClr val="FFFFFF"/>
+                </a:solidFill>
+                <a:latin typeface="Meiryo" pitchFamily="34" charset="0"/>
+                <a:ea typeface="Meiryo" pitchFamily="34" charset="-122"/>
+                <a:cs typeface="Meiryo" pitchFamily="34" charset="-120"/>
+              </a:rPr>
+              <a:t>ではなく</a:t>
+            </a:r>
+            <a:r>
+              <a:rPr lang="en-US" sz="1800" b="1" dirty="0">
+                <a:solidFill>
+                  <a:srgbClr val="FFFFFF"/>
+                </a:solidFill>
+                <a:latin typeface="Meiryo" pitchFamily="34" charset="0"/>
+                <a:ea typeface="Meiryo" pitchFamily="34" charset="-122"/>
+                <a:cs typeface="Meiryo" pitchFamily="34" charset="-120"/>
+              </a:rPr>
+              <a:t>、</a:t>
             </a:r>
             <a:endParaRPr lang="en-US" sz="1800" dirty="0"/>
           </a:p>
@@ -11915,7 +11959,7 @@
               <a:buNone/>
             </a:pPr>
             <a:r>
-              <a:rPr lang="en-US" sz="1350" dirty="0">
+              <a:rPr lang="en-US" sz="1350" dirty="0" err="1">
                 <a:solidFill>
                   <a:srgbClr val="5D6B85"/>
                 </a:solidFill>
@@ -11923,7 +11967,18 @@
                 <a:ea typeface="Meiryo" pitchFamily="34" charset="-122"/>
                 <a:cs typeface="Meiryo" pitchFamily="34" charset="-120"/>
               </a:rPr>
-              <a:t>操作方法ではなく「何を解決する技術なのか」を持ち帰ってもらう</a:t>
+              <a:t>操作方法ではなく「何を解決する技術なのか」を</a:t>
+            </a:r>
+            <a:r>
+              <a:rPr lang="ja-JP" altLang="en-US" sz="1350" dirty="0">
+                <a:solidFill>
+                  <a:srgbClr val="5D6B85"/>
+                </a:solidFill>
+                <a:latin typeface="Meiryo" pitchFamily="34" charset="0"/>
+                <a:ea typeface="Meiryo" pitchFamily="34" charset="-122"/>
+                <a:cs typeface="Meiryo" pitchFamily="34" charset="-120"/>
+              </a:rPr>
+              <a:t>理解してもらう</a:t>
             </a:r>
             <a:endParaRPr lang="en-US" sz="1350" dirty="0"/>
           </a:p>
@@ -14944,7 +14999,40 @@
                 <a:ea typeface="Meiryo" pitchFamily="34" charset="-122"/>
                 <a:cs typeface="Meiryo" pitchFamily="34" charset="-120"/>
               </a:rPr>
-              <a:t>1台1台は使い捨てでよい。</a:t>
+              <a:t>1台1台は</a:t>
+            </a:r>
+            <a:r>
+              <a:rPr lang="ja-JP" altLang="en-US" sz="1300" dirty="0">
+                <a:solidFill>
+                  <a:srgbClr val="E4EDFF"/>
+                </a:solidFill>
+                <a:latin typeface="Meiryo" pitchFamily="34" charset="0"/>
+                <a:ea typeface="Meiryo" pitchFamily="34" charset="-122"/>
+                <a:cs typeface="Meiryo" pitchFamily="34" charset="-120"/>
+              </a:rPr>
+              <a:t>信頼性が低め</a:t>
+            </a:r>
+            <a:r>
+              <a:rPr lang="en-US" sz="1300" dirty="0" err="1">
+                <a:solidFill>
+                  <a:srgbClr val="E4EDFF"/>
+                </a:solidFill>
+                <a:latin typeface="Meiryo" pitchFamily="34" charset="0"/>
+                <a:ea typeface="Meiryo" pitchFamily="34" charset="-122"/>
+                <a:cs typeface="Meiryo" pitchFamily="34" charset="-120"/>
+              </a:rPr>
+              <a:t>でよい</a:t>
+            </a:r>
+            <a:r>
+              <a:rPr lang="en-US" sz="1300" dirty="0">
+                <a:solidFill>
+                  <a:srgbClr val="E4EDFF"/>
+                </a:solidFill>
+                <a:latin typeface="Meiryo" pitchFamily="34" charset="0"/>
+                <a:ea typeface="Meiryo" pitchFamily="34" charset="-122"/>
+                <a:cs typeface="Meiryo" pitchFamily="34" charset="-120"/>
+              </a:rPr>
+              <a:t>。</a:t>
             </a:r>
             <a:endParaRPr lang="en-US" sz="1300" dirty="0"/>
           </a:p>
@@ -15125,7 +15213,51 @@
                 <a:ea typeface="Meiryo" pitchFamily="34" charset="-122"/>
                 <a:cs typeface="Meiryo" pitchFamily="34" charset="-120"/>
               </a:rPr>
-              <a:t>1台1台は使い捨てで、台数で支える。だから増やせば冗長性も処理能力も上がり、減らせばコストが下がる。</a:t>
+              <a:t>1台1台は</a:t>
+            </a:r>
+            <a:r>
+              <a:rPr lang="ja-JP" altLang="en-US" sz="1400" dirty="0">
+                <a:solidFill>
+                  <a:srgbClr val="1A2233"/>
+                </a:solidFill>
+                <a:latin typeface="Meiryo" pitchFamily="34" charset="0"/>
+                <a:ea typeface="Meiryo" pitchFamily="34" charset="-122"/>
+                <a:cs typeface="Meiryo" pitchFamily="34" charset="-120"/>
+              </a:rPr>
+              <a:t>信頼性が低め</a:t>
+            </a:r>
+            <a:r>
+              <a:rPr lang="en-US" sz="1400" dirty="0">
+                <a:solidFill>
+                  <a:srgbClr val="1A2233"/>
+                </a:solidFill>
+                <a:latin typeface="Meiryo" pitchFamily="34" charset="0"/>
+                <a:ea typeface="Meiryo" pitchFamily="34" charset="-122"/>
+                <a:cs typeface="Meiryo" pitchFamily="34" charset="-120"/>
+              </a:rPr>
+              <a:t>で</a:t>
+            </a:r>
+            <a:r>
+              <a:rPr lang="ja-JP" altLang="en-US" sz="1400" dirty="0">
+                <a:solidFill>
+                  <a:srgbClr val="1A2233"/>
+                </a:solidFill>
+                <a:latin typeface="Meiryo" pitchFamily="34" charset="0"/>
+                <a:ea typeface="Meiryo" pitchFamily="34" charset="-122"/>
+                <a:cs typeface="Meiryo" pitchFamily="34" charset="-120"/>
+              </a:rPr>
+              <a:t>も</a:t>
+            </a:r>
+            <a:r>
+              <a:rPr lang="en-US" sz="1400" dirty="0">
+                <a:solidFill>
+                  <a:srgbClr val="1A2233"/>
+                </a:solidFill>
+                <a:latin typeface="Meiryo" pitchFamily="34" charset="0"/>
+                <a:ea typeface="Meiryo" pitchFamily="34" charset="-122"/>
+                <a:cs typeface="Meiryo" pitchFamily="34" charset="-120"/>
+              </a:rPr>
+              <a:t>、台数で支える。だから増やせば冗長性も処理能力も上がり、減らせばコストが下がる。</a:t>
             </a:r>
             <a:endParaRPr lang="en-US" sz="1400" dirty="0"/>
           </a:p>
